--- a/decks/geog-africa/geog-africa_ch2_physical-africa.pptx
+++ b/decks/geog-africa/geog-africa_ch2_physical-africa.pptx
@@ -125,30 +125,30 @@
   <p:extLst>
     <p:ext uri="{521415D9-36F7-43E2-AB2F-B90AF26B5E84}">
       <p14:sectionLst xmlns:p14="http://schemas.microsoft.com/office/powerpoint/2010/main">
-        <p14:section name="Opening" id="{6b6fc4fb-cc9b-8736-df0a-0d3aca38b6d4}">
+        <p14:section name="Opening" id="{d9017560-432f-d6b8-547c-f118dae4bfb8}">
           <p14:sldIdLst>
             <p14:sldId id="256"/>
           </p14:sldIdLst>
         </p14:section>
-        <p14:section name="Gate" id="{fef5be72-925d-edf2-cb50-efb394d77ae0}">
+        <p14:section name="Gate" id="{e5e28078-ffac-3544-29b9-c6f302ca6846}">
           <p14:sldIdLst>
             <p14:sldId id="257"/>
             <p14:sldId id="258"/>
           </p14:sldIdLst>
         </p14:section>
-        <p14:section name="Pre-teach" id="{5327fd8b-e177-c828-b5bd-e261417f0378}">
+        <p14:section name="Pre-teach" id="{7ffddfc7-d310-f620-8616-d1f64dabeaa5}">
           <p14:sldIdLst>
             <p14:sldId id="259"/>
             <p14:sldId id="260"/>
           </p14:sldIdLst>
         </p14:section>
-        <p14:section name="Read-along" id="{4ba52276-f808-a686-1974-8451d61fdea6}">
+        <p14:section name="Read-along" id="{38ca4294-d9eb-c406-68bd-edc967eea6ff}">
           <p14:sldIdLst>
             <p14:sldId id="261"/>
             <p14:sldId id="262"/>
           </p14:sldIdLst>
         </p14:section>
-        <p14:section name="Teach" id="{74d609ee-bdba-c645-f139-ec17894c7360}">
+        <p14:section name="Teach" id="{460282a1-df1c-c290-96c0-c772fc8a298f}">
           <p14:sldIdLst>
             <p14:sldId id="263"/>
             <p14:sldId id="264"/>
@@ -156,7 +156,7 @@
             <p14:sldId id="266"/>
           </p14:sldIdLst>
         </p14:section>
-        <p14:section name="Routes" id="{ad840b55-9212-2080-0609-fdc1b0a98721}">
+        <p14:section name="Routes" id="{9da0ae3d-2749-1682-3103-2de342d7a0a0}">
           <p14:sldIdLst>
             <p14:sldId id="267"/>
             <p14:sldId id="268"/>
@@ -164,12 +164,12 @@
             <p14:sldId id="270"/>
           </p14:sldIdLst>
         </p14:section>
-        <p14:section name="Close" id="{76a4258c-a984-6eb1-7c1f-7341bf17ecce}">
+        <p14:section name="Close" id="{eca582ef-f4f3-d0e3-9229-9a5261179781}">
           <p14:sldIdLst>
             <p14:sldId id="271"/>
           </p14:sldIdLst>
         </p14:section>
-        <p14:section name="Answers" id="{55941404-495d-a169-5b5a-80c0452d3096}">
+        <p14:section name="Answers" id="{fa6c1243-6eda-e72f-1bbf-cc86d77b1788}">
           <p14:sldIdLst>
             <p14:sldId id="272"/>
             <p14:sldId id="273"/>
